--- a/Presentation/LMS Presentation.pptx
+++ b/Presentation/LMS Presentation.pptx
@@ -34175,20 +34175,18 @@
           <p:cNvPicPr/>
           <p:nvPr/>
         </p:nvPicPr>
-        <p:blipFill>
+        <p:blipFill rotWithShape="1">
           <a:blip r:embed="rId2">
             <a:lum/>
             <a:alphaModFix/>
           </a:blip>
-          <a:srcRect/>
-          <a:stretch>
-            <a:fillRect/>
-          </a:stretch>
+          <a:srcRect r="12238" b="72276"/>
+          <a:stretch/>
         </p:blipFill>
         <p:spPr>
           <a:xfrm>
-            <a:off x="474134" y="266701"/>
-            <a:ext cx="11243732" cy="6324599"/>
+            <a:off x="1162100" y="2552258"/>
+            <a:ext cx="9867801" cy="1753484"/>
           </a:xfrm>
           <a:prstGeom prst="rect">
             <a:avLst/>

--- a/Presentation/LMS Presentation.pptx
+++ b/Presentation/LMS Presentation.pptx
@@ -34081,30 +34081,28 @@
       </p:sp>
       <p:pic>
         <p:nvPicPr>
-          <p:cNvPr id="8" name="Kép2">
+          <p:cNvPr id="9" name="Kép2">
             <a:extLst>
               <a:ext uri="{FF2B5EF4-FFF2-40B4-BE49-F238E27FC236}">
-                <a16:creationId xmlns:a16="http://schemas.microsoft.com/office/drawing/2014/main" id="{E0D967F9-B03D-4E7E-A26D-878D70E2C4ED}"/>
+                <a16:creationId xmlns:a16="http://schemas.microsoft.com/office/drawing/2014/main" id="{2A03F608-918A-41AD-8FF5-4DB9BCF3A98E}"/>
               </a:ext>
             </a:extLst>
           </p:cNvPr>
           <p:cNvPicPr/>
           <p:nvPr/>
         </p:nvPicPr>
-        <p:blipFill>
+        <p:blipFill rotWithShape="1">
           <a:blip r:embed="rId2">
             <a:lum/>
             <a:alphaModFix/>
           </a:blip>
-          <a:srcRect/>
-          <a:stretch>
-            <a:fillRect/>
-          </a:stretch>
+          <a:srcRect r="12238" b="72276"/>
+          <a:stretch/>
         </p:blipFill>
         <p:spPr>
           <a:xfrm>
-            <a:off x="12359640" y="266701"/>
-            <a:ext cx="11243732" cy="6324599"/>
+            <a:off x="12435046" y="2552258"/>
+            <a:ext cx="9867801" cy="1753484"/>
           </a:xfrm>
           <a:prstGeom prst="rect">
             <a:avLst/>
@@ -34498,6 +34496,294 @@
             <a:r>
               <a:rPr lang="en-GB" dirty="0"/>
               <a:t>Image</a:t>
+            </a:r>
+          </a:p>
+        </p:txBody>
+      </p:sp>
+      <p:sp>
+        <p:nvSpPr>
+          <p:cNvPr id="6" name="Title 3">
+            <a:extLst>
+              <a:ext uri="{FF2B5EF4-FFF2-40B4-BE49-F238E27FC236}">
+                <a16:creationId xmlns:a16="http://schemas.microsoft.com/office/drawing/2014/main" id="{92ED0E45-53A9-42C8-8F8A-040100DF27B1}"/>
+              </a:ext>
+            </a:extLst>
+          </p:cNvPr>
+          <p:cNvSpPr txBox="1">
+            <a:spLocks/>
+          </p:cNvSpPr>
+          <p:nvPr/>
+        </p:nvSpPr>
+        <p:spPr>
+          <a:xfrm>
+            <a:off x="596108" y="347963"/>
+            <a:ext cx="4048299" cy="763600"/>
+          </a:xfrm>
+          <a:prstGeom prst="rect">
+            <a:avLst/>
+          </a:prstGeom>
+          <a:noFill/>
+          <a:ln>
+            <a:noFill/>
+          </a:ln>
+        </p:spPr>
+        <p:txBody>
+          <a:bodyPr spcFirstLastPara="1" wrap="square" lIns="91425" tIns="91425" rIns="91425" bIns="91425" anchor="t" anchorCtr="0">
+            <a:noAutofit/>
+          </a:bodyPr>
+          <a:lstStyle>
+            <a:defPPr marR="0" lvl="0" algn="l" rtl="0">
+              <a:lnSpc>
+                <a:spcPct val="100000"/>
+              </a:lnSpc>
+              <a:spcBef>
+                <a:spcPts val="0"/>
+              </a:spcBef>
+              <a:spcAft>
+                <a:spcPts val="0"/>
+              </a:spcAft>
+            </a:defPPr>
+            <a:lvl1pPr marR="0" lvl="0" algn="l" rtl="0" eaLnBrk="1" hangingPunct="1">
+              <a:lnSpc>
+                <a:spcPct val="100000"/>
+              </a:lnSpc>
+              <a:spcBef>
+                <a:spcPts val="0"/>
+              </a:spcBef>
+              <a:spcAft>
+                <a:spcPts val="0"/>
+              </a:spcAft>
+              <a:buClr>
+                <a:schemeClr val="dk1"/>
+              </a:buClr>
+              <a:buSzPts val="3000"/>
+              <a:buFont typeface="Oxanium"/>
+              <a:buNone/>
+              <a:defRPr sz="3000" b="1" i="0" u="none" strike="noStrike" cap="none">
+                <a:solidFill>
+                  <a:schemeClr val="dk1"/>
+                </a:solidFill>
+                <a:latin typeface="Oxanium"/>
+                <a:ea typeface="Oxanium"/>
+                <a:cs typeface="Oxanium"/>
+                <a:sym typeface="Oxanium"/>
+              </a:defRPr>
+            </a:lvl1pPr>
+            <a:lvl2pPr marR="0" lvl="1" algn="l" rtl="0" eaLnBrk="1" hangingPunct="1">
+              <a:lnSpc>
+                <a:spcPct val="100000"/>
+              </a:lnSpc>
+              <a:spcBef>
+                <a:spcPts val="0"/>
+              </a:spcBef>
+              <a:spcAft>
+                <a:spcPts val="0"/>
+              </a:spcAft>
+              <a:buClr>
+                <a:schemeClr val="dk1"/>
+              </a:buClr>
+              <a:buSzPts val="3000"/>
+              <a:buFont typeface="Oxanium"/>
+              <a:buNone/>
+              <a:defRPr sz="3000" b="1" i="0" u="none" strike="noStrike" cap="none">
+                <a:solidFill>
+                  <a:schemeClr val="dk1"/>
+                </a:solidFill>
+                <a:latin typeface="Oxanium"/>
+                <a:ea typeface="Oxanium"/>
+                <a:cs typeface="Oxanium"/>
+                <a:sym typeface="Oxanium"/>
+              </a:defRPr>
+            </a:lvl2pPr>
+            <a:lvl3pPr marR="0" lvl="2" algn="l" rtl="0" eaLnBrk="1" hangingPunct="1">
+              <a:lnSpc>
+                <a:spcPct val="100000"/>
+              </a:lnSpc>
+              <a:spcBef>
+                <a:spcPts val="0"/>
+              </a:spcBef>
+              <a:spcAft>
+                <a:spcPts val="0"/>
+              </a:spcAft>
+              <a:buClr>
+                <a:schemeClr val="dk1"/>
+              </a:buClr>
+              <a:buSzPts val="3000"/>
+              <a:buFont typeface="Oxanium"/>
+              <a:buNone/>
+              <a:defRPr sz="3000" b="1" i="0" u="none" strike="noStrike" cap="none">
+                <a:solidFill>
+                  <a:schemeClr val="dk1"/>
+                </a:solidFill>
+                <a:latin typeface="Oxanium"/>
+                <a:ea typeface="Oxanium"/>
+                <a:cs typeface="Oxanium"/>
+                <a:sym typeface="Oxanium"/>
+              </a:defRPr>
+            </a:lvl3pPr>
+            <a:lvl4pPr marR="0" lvl="3" algn="l" rtl="0" eaLnBrk="1" hangingPunct="1">
+              <a:lnSpc>
+                <a:spcPct val="100000"/>
+              </a:lnSpc>
+              <a:spcBef>
+                <a:spcPts val="0"/>
+              </a:spcBef>
+              <a:spcAft>
+                <a:spcPts val="0"/>
+              </a:spcAft>
+              <a:buClr>
+                <a:schemeClr val="dk1"/>
+              </a:buClr>
+              <a:buSzPts val="3000"/>
+              <a:buFont typeface="Oxanium"/>
+              <a:buNone/>
+              <a:defRPr sz="3000" b="1" i="0" u="none" strike="noStrike" cap="none">
+                <a:solidFill>
+                  <a:schemeClr val="dk1"/>
+                </a:solidFill>
+                <a:latin typeface="Oxanium"/>
+                <a:ea typeface="Oxanium"/>
+                <a:cs typeface="Oxanium"/>
+                <a:sym typeface="Oxanium"/>
+              </a:defRPr>
+            </a:lvl4pPr>
+            <a:lvl5pPr marR="0" lvl="4" algn="l" rtl="0" eaLnBrk="1" hangingPunct="1">
+              <a:lnSpc>
+                <a:spcPct val="100000"/>
+              </a:lnSpc>
+              <a:spcBef>
+                <a:spcPts val="0"/>
+              </a:spcBef>
+              <a:spcAft>
+                <a:spcPts val="0"/>
+              </a:spcAft>
+              <a:buClr>
+                <a:schemeClr val="dk1"/>
+              </a:buClr>
+              <a:buSzPts val="3000"/>
+              <a:buFont typeface="Oxanium"/>
+              <a:buNone/>
+              <a:defRPr sz="3000" b="1" i="0" u="none" strike="noStrike" cap="none">
+                <a:solidFill>
+                  <a:schemeClr val="dk1"/>
+                </a:solidFill>
+                <a:latin typeface="Oxanium"/>
+                <a:ea typeface="Oxanium"/>
+                <a:cs typeface="Oxanium"/>
+                <a:sym typeface="Oxanium"/>
+              </a:defRPr>
+            </a:lvl5pPr>
+            <a:lvl6pPr marR="0" lvl="5" algn="l" rtl="0" eaLnBrk="1" hangingPunct="1">
+              <a:lnSpc>
+                <a:spcPct val="100000"/>
+              </a:lnSpc>
+              <a:spcBef>
+                <a:spcPts val="0"/>
+              </a:spcBef>
+              <a:spcAft>
+                <a:spcPts val="0"/>
+              </a:spcAft>
+              <a:buClr>
+                <a:schemeClr val="dk1"/>
+              </a:buClr>
+              <a:buSzPts val="3000"/>
+              <a:buFont typeface="Oxanium"/>
+              <a:buNone/>
+              <a:defRPr sz="3000" b="1" i="0" u="none" strike="noStrike" cap="none">
+                <a:solidFill>
+                  <a:schemeClr val="dk1"/>
+                </a:solidFill>
+                <a:latin typeface="Oxanium"/>
+                <a:ea typeface="Oxanium"/>
+                <a:cs typeface="Oxanium"/>
+                <a:sym typeface="Oxanium"/>
+              </a:defRPr>
+            </a:lvl6pPr>
+            <a:lvl7pPr marR="0" lvl="6" algn="l" rtl="0" eaLnBrk="1" hangingPunct="1">
+              <a:lnSpc>
+                <a:spcPct val="100000"/>
+              </a:lnSpc>
+              <a:spcBef>
+                <a:spcPts val="0"/>
+              </a:spcBef>
+              <a:spcAft>
+                <a:spcPts val="0"/>
+              </a:spcAft>
+              <a:buClr>
+                <a:schemeClr val="dk1"/>
+              </a:buClr>
+              <a:buSzPts val="3000"/>
+              <a:buFont typeface="Oxanium"/>
+              <a:buNone/>
+              <a:defRPr sz="3000" b="1" i="0" u="none" strike="noStrike" cap="none">
+                <a:solidFill>
+                  <a:schemeClr val="dk1"/>
+                </a:solidFill>
+                <a:latin typeface="Oxanium"/>
+                <a:ea typeface="Oxanium"/>
+                <a:cs typeface="Oxanium"/>
+                <a:sym typeface="Oxanium"/>
+              </a:defRPr>
+            </a:lvl7pPr>
+            <a:lvl8pPr marR="0" lvl="7" algn="l" rtl="0" eaLnBrk="1" hangingPunct="1">
+              <a:lnSpc>
+                <a:spcPct val="100000"/>
+              </a:lnSpc>
+              <a:spcBef>
+                <a:spcPts val="0"/>
+              </a:spcBef>
+              <a:spcAft>
+                <a:spcPts val="0"/>
+              </a:spcAft>
+              <a:buClr>
+                <a:schemeClr val="dk1"/>
+              </a:buClr>
+              <a:buSzPts val="3000"/>
+              <a:buFont typeface="Oxanium"/>
+              <a:buNone/>
+              <a:defRPr sz="3000" b="1" i="0" u="none" strike="noStrike" cap="none">
+                <a:solidFill>
+                  <a:schemeClr val="dk1"/>
+                </a:solidFill>
+                <a:latin typeface="Oxanium"/>
+                <a:ea typeface="Oxanium"/>
+                <a:cs typeface="Oxanium"/>
+                <a:sym typeface="Oxanium"/>
+              </a:defRPr>
+            </a:lvl8pPr>
+            <a:lvl9pPr marR="0" lvl="8" algn="l" rtl="0" eaLnBrk="1" hangingPunct="1">
+              <a:lnSpc>
+                <a:spcPct val="100000"/>
+              </a:lnSpc>
+              <a:spcBef>
+                <a:spcPts val="0"/>
+              </a:spcBef>
+              <a:spcAft>
+                <a:spcPts val="0"/>
+              </a:spcAft>
+              <a:buClr>
+                <a:schemeClr val="dk1"/>
+              </a:buClr>
+              <a:buSzPts val="3000"/>
+              <a:buFont typeface="Oxanium"/>
+              <a:buNone/>
+              <a:defRPr sz="3000" b="1" i="0" u="none" strike="noStrike" cap="none">
+                <a:solidFill>
+                  <a:schemeClr val="dk1"/>
+                </a:solidFill>
+                <a:latin typeface="Oxanium"/>
+                <a:ea typeface="Oxanium"/>
+                <a:cs typeface="Oxanium"/>
+                <a:sym typeface="Oxanium"/>
+              </a:defRPr>
+            </a:lvl9pPr>
+          </a:lstStyle>
+          <a:p>
+            <a:r>
+              <a:rPr lang="en-GB" sz="4000" dirty="0">
+                <a:effectLst/>
+              </a:rPr>
+              <a:t>Endpoints</a:t>
             </a:r>
           </a:p>
         </p:txBody>

--- a/Presentation/LMS Presentation.pptx
+++ b/Presentation/LMS Presentation.pptx
@@ -23500,15 +23500,20 @@
           <p:nvPr/>
         </p:nvPicPr>
         <p:blipFill>
-          <a:blip r:embed="rId2"/>
-          <a:stretch>
-            <a:fillRect/>
-          </a:stretch>
+          <a:blip r:embed="rId2">
+            <a:extLst>
+              <a:ext uri="{28A0092B-C50C-407E-A947-70E740481C1C}">
+                <a14:useLocalDpi xmlns:a14="http://schemas.microsoft.com/office/drawing/2010/main" val="0"/>
+              </a:ext>
+            </a:extLst>
+          </a:blip>
+          <a:srcRect/>
+          <a:stretch/>
         </p:blipFill>
         <p:spPr>
           <a:xfrm>
-            <a:off x="2152501" y="1651594"/>
-            <a:ext cx="3368217" cy="4706345"/>
+            <a:off x="2152501" y="1700880"/>
+            <a:ext cx="3368217" cy="4607772"/>
           </a:xfrm>
           <a:prstGeom prst="rect">
             <a:avLst/>
@@ -24300,15 +24305,20 @@
           <p:nvPr/>
         </p:nvPicPr>
         <p:blipFill>
-          <a:blip r:embed="rId2"/>
-          <a:stretch>
-            <a:fillRect/>
-          </a:stretch>
+          <a:blip r:embed="rId2">
+            <a:extLst>
+              <a:ext uri="{28A0092B-C50C-407E-A947-70E740481C1C}">
+                <a14:useLocalDpi xmlns:a14="http://schemas.microsoft.com/office/drawing/2010/main" val="0"/>
+              </a:ext>
+            </a:extLst>
+          </a:blip>
+          <a:srcRect/>
+          <a:stretch/>
         </p:blipFill>
         <p:spPr>
           <a:xfrm>
-            <a:off x="2152501" y="1651594"/>
-            <a:ext cx="3368217" cy="4706345"/>
+            <a:off x="2152501" y="1700880"/>
+            <a:ext cx="3368217" cy="4607772"/>
           </a:xfrm>
           <a:prstGeom prst="rect">
             <a:avLst/>
@@ -25459,15 +25469,20 @@
           <p:nvPr/>
         </p:nvPicPr>
         <p:blipFill>
-          <a:blip r:embed="rId2"/>
-          <a:stretch>
-            <a:fillRect/>
-          </a:stretch>
+          <a:blip r:embed="rId2">
+            <a:extLst>
+              <a:ext uri="{28A0092B-C50C-407E-A947-70E740481C1C}">
+                <a14:useLocalDpi xmlns:a14="http://schemas.microsoft.com/office/drawing/2010/main" val="0"/>
+              </a:ext>
+            </a:extLst>
+          </a:blip>
+          <a:srcRect/>
+          <a:stretch/>
         </p:blipFill>
         <p:spPr>
           <a:xfrm>
-            <a:off x="6820425" y="1566659"/>
-            <a:ext cx="3526491" cy="4687455"/>
+            <a:off x="7419889" y="1566659"/>
+            <a:ext cx="2327563" cy="4687455"/>
           </a:xfrm>
           <a:prstGeom prst="rect">
             <a:avLst/>
@@ -26203,15 +26218,20 @@
           <p:nvPr/>
         </p:nvPicPr>
         <p:blipFill>
-          <a:blip r:embed="rId2"/>
-          <a:stretch>
-            <a:fillRect/>
-          </a:stretch>
+          <a:blip r:embed="rId2">
+            <a:extLst>
+              <a:ext uri="{28A0092B-C50C-407E-A947-70E740481C1C}">
+                <a14:useLocalDpi xmlns:a14="http://schemas.microsoft.com/office/drawing/2010/main" val="0"/>
+              </a:ext>
+            </a:extLst>
+          </a:blip>
+          <a:srcRect/>
+          <a:stretch/>
         </p:blipFill>
         <p:spPr>
           <a:xfrm>
-            <a:off x="710526" y="1479271"/>
-            <a:ext cx="10770948" cy="5232316"/>
+            <a:off x="710526" y="1498962"/>
+            <a:ext cx="10770948" cy="5192933"/>
           </a:xfrm>
           <a:prstGeom prst="rect">
             <a:avLst/>

--- a/Presentation/LMS Presentation.pptx
+++ b/Presentation/LMS Presentation.pptx
@@ -25533,6 +25533,9 @@
                     <p:cTn id="3" fill="hold">
                       <p:stCondLst>
                         <p:cond delay="indefinite"/>
+                        <p:cond evt="onBegin" delay="0">
+                          <p:tn val="2"/>
+                        </p:cond>
                       </p:stCondLst>
                       <p:childTnLst>
                         <p:par>
@@ -25542,7 +25545,7 @@
                             </p:stCondLst>
                             <p:childTnLst>
                               <p:par>
-                                <p:cTn id="5" presetID="10" presetClass="entr" presetSubtype="0" fill="hold" grpId="0" nodeType="clickEffect">
+                                <p:cTn id="5" presetID="10" presetClass="entr" presetSubtype="0" fill="hold" nodeType="afterEffect">
                                   <p:stCondLst>
                                     <p:cond delay="0"/>
                                   </p:stCondLst>
@@ -25550,6 +25553,59 @@
                                     <p:set>
                                       <p:cBhvr>
                                         <p:cTn id="6" dur="1" fill="hold">
+                                          <p:stCondLst>
+                                            <p:cond delay="0"/>
+                                          </p:stCondLst>
+                                        </p:cTn>
+                                        <p:tgtEl>
+                                          <p:spTgt spid="8"/>
+                                        </p:tgtEl>
+                                        <p:attrNameLst>
+                                          <p:attrName>style.visibility</p:attrName>
+                                        </p:attrNameLst>
+                                      </p:cBhvr>
+                                      <p:to>
+                                        <p:strVal val="visible"/>
+                                      </p:to>
+                                    </p:set>
+                                    <p:animEffect transition="in" filter="fade">
+                                      <p:cBhvr>
+                                        <p:cTn id="7" dur="500"/>
+                                        <p:tgtEl>
+                                          <p:spTgt spid="8"/>
+                                        </p:tgtEl>
+                                      </p:cBhvr>
+                                    </p:animEffect>
+                                  </p:childTnLst>
+                                </p:cTn>
+                              </p:par>
+                            </p:childTnLst>
+                          </p:cTn>
+                        </p:par>
+                      </p:childTnLst>
+                    </p:cTn>
+                  </p:par>
+                  <p:par>
+                    <p:cTn id="8" fill="hold">
+                      <p:stCondLst>
+                        <p:cond delay="indefinite"/>
+                      </p:stCondLst>
+                      <p:childTnLst>
+                        <p:par>
+                          <p:cTn id="9" fill="hold">
+                            <p:stCondLst>
+                              <p:cond delay="0"/>
+                            </p:stCondLst>
+                            <p:childTnLst>
+                              <p:par>
+                                <p:cTn id="10" presetID="10" presetClass="entr" presetSubtype="0" fill="hold" grpId="0" nodeType="clickEffect">
+                                  <p:stCondLst>
+                                    <p:cond delay="0"/>
+                                  </p:stCondLst>
+                                  <p:childTnLst>
+                                    <p:set>
+                                      <p:cBhvr>
+                                        <p:cTn id="11" dur="1" fill="hold">
                                           <p:stCondLst>
                                             <p:cond delay="0"/>
                                           </p:stCondLst>
@@ -25567,7 +25623,7 @@
                                     </p:set>
                                     <p:animEffect transition="in" filter="fade">
                                       <p:cBhvr>
-                                        <p:cTn id="7" dur="500"/>
+                                        <p:cTn id="12" dur="500"/>
                                         <p:tgtEl>
                                           <p:spTgt spid="7"/>
                                         </p:tgtEl>
@@ -27863,6 +27919,89 @@
       </p:transition>
     </mc:Fallback>
   </mc:AlternateContent>
+  <p:timing>
+    <p:tnLst>
+      <p:par>
+        <p:cTn id="1" dur="indefinite" restart="never" nodeType="tmRoot">
+          <p:childTnLst>
+            <p:seq concurrent="1" nextAc="seek">
+              <p:cTn id="2" dur="indefinite" nodeType="mainSeq">
+                <p:childTnLst>
+                  <p:par>
+                    <p:cTn id="3" fill="hold">
+                      <p:stCondLst>
+                        <p:cond delay="indefinite"/>
+                      </p:stCondLst>
+                      <p:childTnLst>
+                        <p:par>
+                          <p:cTn id="4" fill="hold">
+                            <p:stCondLst>
+                              <p:cond delay="0"/>
+                            </p:stCondLst>
+                            <p:childTnLst>
+                              <p:par>
+                                <p:cTn id="5" presetID="10" presetClass="entr" presetSubtype="0" fill="hold" nodeType="clickEffect">
+                                  <p:stCondLst>
+                                    <p:cond delay="0"/>
+                                  </p:stCondLst>
+                                  <p:childTnLst>
+                                    <p:set>
+                                      <p:cBhvr>
+                                        <p:cTn id="6" dur="1" fill="hold">
+                                          <p:stCondLst>
+                                            <p:cond delay="0"/>
+                                          </p:stCondLst>
+                                        </p:cTn>
+                                        <p:tgtEl>
+                                          <p:spTgt spid="7"/>
+                                        </p:tgtEl>
+                                        <p:attrNameLst>
+                                          <p:attrName>style.visibility</p:attrName>
+                                        </p:attrNameLst>
+                                      </p:cBhvr>
+                                      <p:to>
+                                        <p:strVal val="visible"/>
+                                      </p:to>
+                                    </p:set>
+                                    <p:animEffect transition="in" filter="fade">
+                                      <p:cBhvr>
+                                        <p:cTn id="7" dur="500"/>
+                                        <p:tgtEl>
+                                          <p:spTgt spid="7"/>
+                                        </p:tgtEl>
+                                      </p:cBhvr>
+                                    </p:animEffect>
+                                  </p:childTnLst>
+                                </p:cTn>
+                              </p:par>
+                            </p:childTnLst>
+                          </p:cTn>
+                        </p:par>
+                      </p:childTnLst>
+                    </p:cTn>
+                  </p:par>
+                </p:childTnLst>
+              </p:cTn>
+              <p:prevCondLst>
+                <p:cond evt="onPrev" delay="0">
+                  <p:tgtEl>
+                    <p:sldTgt/>
+                  </p:tgtEl>
+                </p:cond>
+              </p:prevCondLst>
+              <p:nextCondLst>
+                <p:cond evt="onNext" delay="0">
+                  <p:tgtEl>
+                    <p:sldTgt/>
+                  </p:tgtEl>
+                </p:cond>
+              </p:nextCondLst>
+            </p:seq>
+          </p:childTnLst>
+        </p:cTn>
+      </p:par>
+    </p:tnLst>
+  </p:timing>
 </p:sld>
 </file>
 
@@ -35397,10 +35536,10 @@
       </p:sp>
       <p:pic>
         <p:nvPicPr>
-          <p:cNvPr id="8" name="Kép1">
+          <p:cNvPr id="10" name="Kép12">
             <a:extLst>
               <a:ext uri="{FF2B5EF4-FFF2-40B4-BE49-F238E27FC236}">
-                <a16:creationId xmlns:a16="http://schemas.microsoft.com/office/drawing/2014/main" id="{AF3C1AAB-93C5-4992-A147-10B6A6188F2B}"/>
+                <a16:creationId xmlns:a16="http://schemas.microsoft.com/office/drawing/2014/main" id="{0AC9C9E2-48AA-4166-9C44-0FBE436A8453}"/>
               </a:ext>
             </a:extLst>
           </p:cNvPr>
@@ -35419,8 +35558,8 @@
         </p:blipFill>
         <p:spPr>
           <a:xfrm>
-            <a:off x="5231764" y="226712"/>
-            <a:ext cx="2083435" cy="6329084"/>
+            <a:off x="7902556" y="1930392"/>
+            <a:ext cx="3381804" cy="2862587"/>
           </a:xfrm>
           <a:prstGeom prst="rect">
             <a:avLst/>
@@ -35439,30 +35578,34 @@
       </p:pic>
       <p:pic>
         <p:nvPicPr>
-          <p:cNvPr id="10" name="Kép12">
+          <p:cNvPr id="3" name="Kép 2">
             <a:extLst>
               <a:ext uri="{FF2B5EF4-FFF2-40B4-BE49-F238E27FC236}">
-                <a16:creationId xmlns:a16="http://schemas.microsoft.com/office/drawing/2014/main" id="{0AC9C9E2-48AA-4166-9C44-0FBE436A8453}"/>
+                <a16:creationId xmlns:a16="http://schemas.microsoft.com/office/drawing/2014/main" id="{4C75A435-10E0-4BFC-9B81-343AE11A2BC1}"/>
               </a:ext>
             </a:extLst>
           </p:cNvPr>
-          <p:cNvPicPr/>
+          <p:cNvPicPr>
+            <a:picLocks noChangeAspect="1"/>
+          </p:cNvPicPr>
           <p:nvPr/>
         </p:nvPicPr>
         <p:blipFill>
           <a:blip r:embed="rId3">
-            <a:lum/>
-            <a:alphaModFix/>
+            <a:extLst>
+              <a:ext uri="{28A0092B-C50C-407E-A947-70E740481C1C}">
+                <a14:useLocalDpi xmlns:a14="http://schemas.microsoft.com/office/drawing/2010/main" val="0"/>
+              </a:ext>
+            </a:extLst>
           </a:blip>
-          <a:srcRect/>
           <a:stretch>
             <a:fillRect/>
           </a:stretch>
         </p:blipFill>
         <p:spPr>
           <a:xfrm>
-            <a:off x="7902556" y="1930392"/>
-            <a:ext cx="3381804" cy="2862587"/>
+            <a:off x="5273862" y="129133"/>
+            <a:ext cx="1644276" cy="6599734"/>
           </a:xfrm>
           <a:prstGeom prst="rect">
             <a:avLst/>
@@ -35771,7 +35914,7 @@
                                           </p:stCondLst>
                                         </p:cTn>
                                         <p:tgtEl>
-                                          <p:spTgt spid="8"/>
+                                          <p:spTgt spid="3"/>
                                         </p:tgtEl>
                                         <p:attrNameLst>
                                           <p:attrName>style.visibility</p:attrName>
@@ -35785,7 +35928,7 @@
                                       <p:cBhvr>
                                         <p:cTn id="24" dur="500"/>
                                         <p:tgtEl>
-                                          <p:spTgt spid="8"/>
+                                          <p:spTgt spid="3"/>
                                         </p:tgtEl>
                                       </p:cBhvr>
                                     </p:animEffect>
@@ -37402,48 +37545,6 @@
           </a:effectLst>
         </p:spPr>
       </p:pic>
-      <p:pic>
-        <p:nvPicPr>
-          <p:cNvPr id="11" name="Kép4">
-            <a:extLst>
-              <a:ext uri="{FF2B5EF4-FFF2-40B4-BE49-F238E27FC236}">
-                <a16:creationId xmlns:a16="http://schemas.microsoft.com/office/drawing/2014/main" id="{F5F37F3C-1DEA-4FF6-9E1F-3448572237BF}"/>
-              </a:ext>
-            </a:extLst>
-          </p:cNvPr>
-          <p:cNvPicPr/>
-          <p:nvPr/>
-        </p:nvPicPr>
-        <p:blipFill>
-          <a:blip r:embed="rId3">
-            <a:lum/>
-            <a:alphaModFix/>
-          </a:blip>
-          <a:srcRect/>
-          <a:stretch>
-            <a:fillRect/>
-          </a:stretch>
-        </p:blipFill>
-        <p:spPr>
-          <a:xfrm>
-            <a:off x="6824372" y="3935095"/>
-            <a:ext cx="2261871" cy="2184292"/>
-          </a:xfrm>
-          <a:prstGeom prst="rect">
-            <a:avLst/>
-          </a:prstGeom>
-          <a:ln>
-            <a:noFill/>
-          </a:ln>
-          <a:effectLst>
-            <a:outerShdw blurRad="190500" algn="tl" rotWithShape="0">
-              <a:srgbClr val="000000">
-                <a:alpha val="70000"/>
-              </a:srgbClr>
-            </a:outerShdw>
-          </a:effectLst>
-        </p:spPr>
-      </p:pic>
       <p:sp>
         <p:nvSpPr>
           <p:cNvPr id="13" name="Title 3">
@@ -37733,6 +37834,52 @@
           </a:p>
         </p:txBody>
       </p:sp>
+      <p:pic>
+        <p:nvPicPr>
+          <p:cNvPr id="3" name="Kép 2">
+            <a:extLst>
+              <a:ext uri="{FF2B5EF4-FFF2-40B4-BE49-F238E27FC236}">
+                <a16:creationId xmlns:a16="http://schemas.microsoft.com/office/drawing/2014/main" id="{3B5CAC0D-DB15-4D52-9FC2-5C03D173180C}"/>
+              </a:ext>
+            </a:extLst>
+          </p:cNvPr>
+          <p:cNvPicPr>
+            <a:picLocks noChangeAspect="1"/>
+          </p:cNvPicPr>
+          <p:nvPr/>
+        </p:nvPicPr>
+        <p:blipFill>
+          <a:blip r:embed="rId3">
+            <a:extLst>
+              <a:ext uri="{28A0092B-C50C-407E-A947-70E740481C1C}">
+                <a14:useLocalDpi xmlns:a14="http://schemas.microsoft.com/office/drawing/2010/main" val="0"/>
+              </a:ext>
+            </a:extLst>
+          </a:blip>
+          <a:stretch>
+            <a:fillRect/>
+          </a:stretch>
+        </p:blipFill>
+        <p:spPr>
+          <a:xfrm>
+            <a:off x="7010920" y="3932553"/>
+            <a:ext cx="1888776" cy="1994358"/>
+          </a:xfrm>
+          <a:prstGeom prst="rect">
+            <a:avLst/>
+          </a:prstGeom>
+          <a:ln>
+            <a:noFill/>
+          </a:ln>
+          <a:effectLst>
+            <a:outerShdw blurRad="190500" algn="tl" rotWithShape="0">
+              <a:srgbClr val="000000">
+                <a:alpha val="70000"/>
+              </a:srgbClr>
+            </a:outerShdw>
+          </a:effectLst>
+        </p:spPr>
+      </p:pic>
     </p:spTree>
     <p:extLst>
       <p:ext uri="{BB962C8B-B14F-4D97-AF65-F5344CB8AC3E}">
@@ -38165,7 +38312,7 @@
                                           </p:stCondLst>
                                         </p:cTn>
                                         <p:tgtEl>
-                                          <p:spTgt spid="11"/>
+                                          <p:spTgt spid="3"/>
                                         </p:tgtEl>
                                         <p:attrNameLst>
                                           <p:attrName>style.visibility</p:attrName>
@@ -38179,7 +38326,7 @@
                                       <p:cBhvr>
                                         <p:cTn id="36" dur="500"/>
                                         <p:tgtEl>
-                                          <p:spTgt spid="11"/>
+                                          <p:spTgt spid="3"/>
                                         </p:tgtEl>
                                       </p:cBhvr>
                                     </p:animEffect>
